--- a/Surveying/materials/slides/第02回_測量の基礎と誤差論/改訂版_20261008/測量学_第02回_図解改訂版.pptx
+++ b/Surveying/materials/slides/第02回_測量の基礎と誤差論/改訂版_20261008/測量学_第02回_図解改訂版.pptx
@@ -4505,7 +4505,7 @@
           <a:lstStyle/>
           <a:p>
             <a:r>
-              <a:t>係数の二乗と各観測の分散を掛けて足すと、重みの和が分母に残ります。絶対的な標準偏差が既知の場合と、残差から分散尺度を推定する場合は区別します。</a:t>
+              <a:t>重み付き平均は各観測をw_i/Σw_iの割合で足したものなので、2-4と同じく、割合の二乗に各観測の分散τ₀²/w_iを掛けて足します。Σ(w_i/Σw_i)²×τ₀²/w_i＝τ₀²Σw_i/(Σw_i)²＝τ₀²/Σw_iとなり、重みの和が分母に残ります。τ₀は重み1の観測の真の標準偏差で、2-4のτ（元の1観測の母標準偏差）と区別するため添字0を付けています。絶対的な標準偏差が既知の場合と、残差から分散尺度を推定する場合は区別します。</a:t>
             </a:r>
           </a:p>
         </p:txBody>
@@ -5135,7 +5135,7 @@
           <a:lstStyle/>
           <a:p>
             <a:r>
-              <a:t>これは実機を指定しない仮想的な仕様例です。プラスマイナスという表記だけで最大誤差や95パーセント範囲と決め付けないようにします。</a:t>
+              <a:t>これは実機を指定しない仮想的な仕様例です。プラスマイナスという表記だけで最大誤差や95パーセント範囲と決め付けないようにします。カタログでは距離比例項をbと書くことが多いですが、本講義ではbを定誤差に使っているため、ここではpと書きます。</a:t>
             </a:r>
           </a:p>
         </p:txBody>
@@ -28963,7 +28963,7 @@
       </p:sp>
       <p:pic>
         <p:nvPicPr>
-          <p:cNvPr id="4" name="Picture 3" descr="eq_390d8ba99bdc.png"/>
+          <p:cNvPr id="4" name="Picture 3" descr="eq_eb3a799f3459.png"/>
           <p:cNvPicPr>
             <a:picLocks noChangeAspect="1"/>
           </p:cNvPicPr>
@@ -28977,8 +28977,8 @@
         </p:blipFill>
         <p:spPr>
           <a:xfrm>
-            <a:off x="4378147" y="1444752"/>
-            <a:ext cx="3435400" cy="2559710"/>
+            <a:off x="4562399" y="1444752"/>
+            <a:ext cx="3066897" cy="2321966"/>
           </a:xfrm>
           <a:prstGeom prst="rect">
             <a:avLst/>
@@ -28993,8 +28993,8 @@
         </p:nvSpPr>
         <p:spPr>
           <a:xfrm>
-            <a:off x="548640" y="4159910"/>
-            <a:ext cx="11094415" cy="1554480"/>
+            <a:off x="548640" y="3922166"/>
+            <a:ext cx="11094415" cy="1397000"/>
           </a:xfrm>
           <a:prstGeom prst="rect">
             <a:avLst/>
@@ -29013,55 +29013,55 @@
               </a:spcAft>
             </a:pPr>
             <a:r>
-              <a:rPr sz="1800" b="0">
+              <a:rPr sz="1600" b="0">
                 <a:latin typeface="Noto Sans CJK JP"/>
               </a:rPr>
               <a:t>• </a:t>
             </a:r>
             <a:r>
-              <a:rPr sz="1800" b="0">
+              <a:rPr sz="1600" b="0">
                 <a:latin typeface="Noto Sans CJK JP"/>
               </a:rPr>
               <a:t>① 残差の定義 </a:t>
             </a:r>
             <a:r>
-              <a:rPr sz="1800" b="0">
+              <a:rPr sz="1600" b="0">
                 <a:latin typeface="DejaVu Sans"/>
               </a:rPr>
               <a:t>v</a:t>
             </a:r>
             <a:r>
-              <a:rPr sz="1800" b="0" baseline="-25000">
+              <a:rPr sz="1600" b="0" baseline="-25000">
                 <a:latin typeface="DejaVu Sans"/>
               </a:rPr>
               <a:t>i</a:t>
             </a:r>
             <a:r>
-              <a:rPr sz="1800" b="0">
+              <a:rPr sz="1600" b="0">
                 <a:latin typeface="DejaVu Sans"/>
               </a:rPr>
               <a:t>=x</a:t>
             </a:r>
             <a:r>
-              <a:rPr sz="1800" b="0" baseline="-25000">
+              <a:rPr sz="1600" b="0" baseline="-25000">
                 <a:latin typeface="DejaVu Sans"/>
               </a:rPr>
               <a:t>i</a:t>
             </a:r>
             <a:r>
-              <a:rPr sz="1800" b="0">
+              <a:rPr sz="1600" b="0">
                 <a:latin typeface="DejaVu Sans"/>
               </a:rPr>
               <a:t>-x̄</a:t>
             </a:r>
             <a:r>
-              <a:rPr sz="1800" b="0" baseline="-25000">
+              <a:rPr sz="1600" b="0" baseline="-25000">
                 <a:latin typeface="DejaVu Sans"/>
               </a:rPr>
               <a:t>w</a:t>
             </a:r>
             <a:r>
-              <a:rPr sz="1800" b="0">
+              <a:rPr sz="1600" b="0">
                 <a:latin typeface="Noto Sans CJK JP"/>
               </a:rPr>
               <a:t> を代入する。</a:t>
@@ -29074,67 +29074,67 @@
               </a:spcAft>
             </a:pPr>
             <a:r>
-              <a:rPr sz="1800" b="0">
+              <a:rPr sz="1600" b="0">
                 <a:latin typeface="Noto Sans CJK JP"/>
               </a:rPr>
               <a:t>• </a:t>
             </a:r>
             <a:r>
-              <a:rPr sz="1800" b="0">
+              <a:rPr sz="1600" b="0">
                 <a:latin typeface="Noto Sans CJK JP"/>
               </a:rPr>
               <a:t>② 分配法則 </a:t>
             </a:r>
             <a:r>
-              <a:rPr sz="1800" b="0">
+              <a:rPr sz="1600" b="0">
                 <a:latin typeface="DejaVu Sans"/>
               </a:rPr>
               <a:t>Σ(a</a:t>
             </a:r>
             <a:r>
-              <a:rPr sz="1800" b="0" baseline="-25000">
+              <a:rPr sz="1600" b="0" baseline="-25000">
                 <a:latin typeface="DejaVu Sans"/>
               </a:rPr>
               <a:t>i</a:t>
             </a:r>
             <a:r>
-              <a:rPr sz="1800" b="0">
+              <a:rPr sz="1600" b="0">
                 <a:latin typeface="DejaVu Sans"/>
               </a:rPr>
               <a:t>-b</a:t>
             </a:r>
             <a:r>
-              <a:rPr sz="1800" b="0" baseline="-25000">
+              <a:rPr sz="1600" b="0" baseline="-25000">
                 <a:latin typeface="DejaVu Sans"/>
               </a:rPr>
               <a:t>i</a:t>
             </a:r>
             <a:r>
-              <a:rPr sz="1800" b="0">
+              <a:rPr sz="1600" b="0">
                 <a:latin typeface="DejaVu Sans"/>
               </a:rPr>
               <a:t>)=Σ a</a:t>
             </a:r>
             <a:r>
-              <a:rPr sz="1800" b="0" baseline="-25000">
+              <a:rPr sz="1600" b="0" baseline="-25000">
                 <a:latin typeface="DejaVu Sans"/>
               </a:rPr>
               <a:t>i</a:t>
             </a:r>
             <a:r>
-              <a:rPr sz="1800" b="0">
+              <a:rPr sz="1600" b="0">
                 <a:latin typeface="DejaVu Sans"/>
               </a:rPr>
               <a:t>-Σ b</a:t>
             </a:r>
             <a:r>
-              <a:rPr sz="1800" b="0" baseline="-25000">
+              <a:rPr sz="1600" b="0" baseline="-25000">
                 <a:latin typeface="DejaVu Sans"/>
               </a:rPr>
               <a:t>i</a:t>
             </a:r>
             <a:r>
-              <a:rPr sz="1800" b="0">
+              <a:rPr sz="1600" b="0">
                 <a:latin typeface="Noto Sans CJK JP"/>
               </a:rPr>
               <a:t> を使う。</a:t>
@@ -29147,46 +29147,76 @@
               </a:spcAft>
             </a:pPr>
             <a:r>
-              <a:rPr sz="1800" b="0">
+              <a:rPr sz="1600" b="0">
                 <a:latin typeface="Noto Sans CJK JP"/>
               </a:rPr>
               <a:t>• </a:t>
             </a:r>
             <a:r>
-              <a:rPr sz="1800" b="0">
+              <a:rPr sz="1600" b="0">
                 <a:latin typeface="Noto Sans CJK JP"/>
               </a:rPr>
               <a:t>③ </a:t>
             </a:r>
             <a:r>
-              <a:rPr sz="1800" b="0">
+              <a:rPr sz="1600" b="0">
                 <a:latin typeface="DejaVu Sans"/>
               </a:rPr>
               <a:t>x̄</a:t>
             </a:r>
             <a:r>
-              <a:rPr sz="1800" b="0" baseline="-25000">
+              <a:rPr sz="1600" b="0" baseline="-25000">
                 <a:latin typeface="DejaVu Sans"/>
               </a:rPr>
               <a:t>w</a:t>
             </a:r>
             <a:r>
-              <a:rPr sz="1800" b="0">
+              <a:rPr sz="1600" b="0">
                 <a:latin typeface="Noto Sans CJK JP"/>
               </a:rPr>
               <a:t> は </a:t>
             </a:r>
             <a:r>
-              <a:rPr sz="1800" b="0">
+              <a:rPr sz="1600" b="0">
                 <a:latin typeface="DejaVu Sans"/>
               </a:rPr>
               <a:t>i</a:t>
             </a:r>
             <a:r>
-              <a:rPr sz="1800" b="0">
-                <a:latin typeface="Noto Sans CJK JP"/>
-              </a:rPr>
-              <a:t> によらない定数なので、Σの外へ出す。</a:t>
+              <a:rPr sz="1600" b="0">
+                <a:latin typeface="Noto Sans CJK JP"/>
+              </a:rPr>
+              <a:t> によらない定数なので、Σの外へ出す（</a:t>
+            </a:r>
+            <a:r>
+              <a:rPr sz="1600" b="0">
+                <a:latin typeface="DejaVu Sans"/>
+              </a:rPr>
+              <a:t>Σ c a</a:t>
+            </a:r>
+            <a:r>
+              <a:rPr sz="1600" b="0" baseline="-25000">
+                <a:latin typeface="DejaVu Sans"/>
+              </a:rPr>
+              <a:t>i</a:t>
+            </a:r>
+            <a:r>
+              <a:rPr sz="1600" b="0">
+                <a:latin typeface="DejaVu Sans"/>
+              </a:rPr>
+              <a:t>=cΣ a</a:t>
+            </a:r>
+            <a:r>
+              <a:rPr sz="1600" b="0" baseline="-25000">
+                <a:latin typeface="DejaVu Sans"/>
+              </a:rPr>
+              <a:t>i</a:t>
+            </a:r>
+            <a:r>
+              <a:rPr sz="1600" b="0">
+                <a:latin typeface="Noto Sans CJK JP"/>
+              </a:rPr>
+              <a:t>）。</a:t>
             </a:r>
           </a:p>
           <a:p>
@@ -29196,61 +29226,61 @@
               </a:spcAft>
             </a:pPr>
             <a:r>
-              <a:rPr sz="1800" b="0">
+              <a:rPr sz="1600" b="0">
                 <a:latin typeface="Noto Sans CJK JP"/>
               </a:rPr>
               <a:t>• </a:t>
             </a:r>
             <a:r>
-              <a:rPr sz="1800" b="0">
+              <a:rPr sz="1600" b="0">
                 <a:latin typeface="Noto Sans CJK JP"/>
               </a:rPr>
               <a:t>④ </a:t>
             </a:r>
             <a:r>
-              <a:rPr sz="1800" b="0">
+              <a:rPr sz="1600" b="0">
                 <a:latin typeface="DejaVu Sans"/>
               </a:rPr>
               <a:t>x̄</a:t>
             </a:r>
             <a:r>
-              <a:rPr sz="1800" b="0" baseline="-25000">
+              <a:rPr sz="1600" b="0" baseline="-25000">
                 <a:latin typeface="DejaVu Sans"/>
               </a:rPr>
               <a:t>w</a:t>
             </a:r>
             <a:r>
-              <a:rPr sz="1800" b="0">
+              <a:rPr sz="1600" b="0">
                 <a:latin typeface="Noto Sans CJK JP"/>
               </a:rPr>
               <a:t> の定義を代入すると、第2項は </a:t>
             </a:r>
             <a:r>
-              <a:rPr sz="1800" b="0">
+              <a:rPr sz="1600" b="0">
                 <a:latin typeface="DejaVu Sans"/>
               </a:rPr>
               <a:t>Σ w</a:t>
             </a:r>
             <a:r>
-              <a:rPr sz="1800" b="0" baseline="-25000">
+              <a:rPr sz="1600" b="0" baseline="-25000">
                 <a:latin typeface="DejaVu Sans"/>
               </a:rPr>
               <a:t>i</a:t>
             </a:r>
             <a:r>
-              <a:rPr sz="1800" b="0">
+              <a:rPr sz="1600" b="0">
                 <a:latin typeface="DejaVu Sans"/>
               </a:rPr>
               <a:t> x</a:t>
             </a:r>
             <a:r>
-              <a:rPr sz="1800" b="0" baseline="-25000">
+              <a:rPr sz="1600" b="0" baseline="-25000">
                 <a:latin typeface="DejaVu Sans"/>
               </a:rPr>
               <a:t>i</a:t>
             </a:r>
             <a:r>
-              <a:rPr sz="1800" b="0">
+              <a:rPr sz="1600" b="0">
                 <a:latin typeface="Noto Sans CJK JP"/>
               </a:rPr>
               <a:t> に戻り、差は0。</a:t>
@@ -29374,7 +29404,7 @@
                 </a:solidFill>
                 <a:latin typeface="Noto Sans CJK JP"/>
               </a:rPr>
-              <a:t>2-6 重み付き平均の残差と検算②：使った公式と通常の残差和</a:t>
+              <a:t>2-6 重み付き平均の残差と検算②：2-3 との対応と通常の残差和</a:t>
             </a:r>
           </a:p>
         </p:txBody>
@@ -29459,25 +29489,37 @@
               <a:rPr sz="2200" b="0">
                 <a:latin typeface="Noto Sans CJK JP"/>
               </a:rPr>
-              <a:t>使った公式 ②：分配法則 </a:t>
-            </a:r>
-            <a:r>
-              <a:rPr sz="2200" b="0">
-                <a:latin typeface="DejaVu Sans"/>
-              </a:rPr>
-              <a:t>Σ(a</a:t>
+              <a:t>④で使った定義：重み付き平均 </a:t>
+            </a:r>
+            <a:r>
+              <a:rPr sz="2200" b="0">
+                <a:latin typeface="DejaVu Sans"/>
+              </a:rPr>
+              <a:t>x̄</a:t>
             </a:r>
             <a:r>
               <a:rPr sz="2200" b="0" baseline="-25000">
                 <a:latin typeface="DejaVu Sans"/>
               </a:rPr>
+              <a:t>w</a:t>
+            </a:r>
+            <a:r>
+              <a:rPr sz="2200" b="0">
+                <a:latin typeface="DejaVu Sans"/>
+              </a:rPr>
+              <a:t>=Σ w</a:t>
+            </a:r>
+            <a:r>
+              <a:rPr sz="2200" b="0" baseline="-25000">
+                <a:latin typeface="DejaVu Sans"/>
+              </a:rPr>
               <a:t>i</a:t>
             </a:r>
             <a:r>
               <a:rPr sz="2200" b="0">
                 <a:latin typeface="DejaVu Sans"/>
               </a:rPr>
-              <a:t>-b</a:t>
+              <a:t> x</a:t>
             </a:r>
             <a:r>
               <a:rPr sz="2200" b="0" baseline="-25000">
@@ -29489,7 +29531,7 @@
               <a:rPr sz="2200" b="0">
                 <a:latin typeface="DejaVu Sans"/>
               </a:rPr>
-              <a:t>)=Σ a</a:t>
+              <a:t>/Σ w</a:t>
             </a:r>
             <a:r>
               <a:rPr sz="2200" b="0" baseline="-25000">
@@ -29499,15 +29541,9 @@
             </a:r>
             <a:r>
               <a:rPr sz="2200" b="0">
-                <a:latin typeface="DejaVu Sans"/>
-              </a:rPr>
-              <a:t>-Σ b</a:t>
-            </a:r>
-            <a:r>
-              <a:rPr sz="2200" b="0" baseline="-25000">
-                <a:latin typeface="DejaVu Sans"/>
-              </a:rPr>
-              <a:t>i</a:t>
+                <a:latin typeface="Noto Sans CJK JP"/>
+              </a:rPr>
+              <a:t>。</a:t>
             </a:r>
           </a:p>
           <a:p>
@@ -29526,25 +29562,13 @@
               <a:rPr sz="2200" b="0">
                 <a:latin typeface="Noto Sans CJK JP"/>
               </a:rPr>
-              <a:t>使った公式 ③：定数 </a:t>
-            </a:r>
-            <a:r>
-              <a:rPr sz="2200" b="0">
-                <a:latin typeface="DejaVu Sans"/>
-              </a:rPr>
-              <a:t>c</a:t>
-            </a:r>
-            <a:r>
-              <a:rPr sz="2200" b="0">
-                <a:latin typeface="Noto Sans CJK JP"/>
-              </a:rPr>
-              <a:t> は Σ の外へ。</a:t>
-            </a:r>
-            <a:r>
-              <a:rPr sz="2200" b="0">
-                <a:latin typeface="DejaVu Sans"/>
-              </a:rPr>
-              <a:t>Σ c a</a:t>
+              <a:t>重みがすべて </a:t>
+            </a:r>
+            <a:r>
+              <a:rPr sz="2200" b="0">
+                <a:latin typeface="DejaVu Sans"/>
+              </a:rPr>
+              <a:t>w</a:t>
             </a:r>
             <a:r>
               <a:rPr sz="2200" b="0" baseline="-25000">
@@ -29556,13 +29580,79 @@
               <a:rPr sz="2200" b="0">
                 <a:latin typeface="DejaVu Sans"/>
               </a:rPr>
-              <a:t>=cΣ a</a:t>
+              <a:t>=1</a:t>
+            </a:r>
+            <a:r>
+              <a:rPr sz="2200" b="0">
+                <a:latin typeface="Noto Sans CJK JP"/>
+              </a:rPr>
+              <a:t> なら、</a:t>
+            </a:r>
+            <a:r>
+              <a:rPr sz="2200" b="0">
+                <a:latin typeface="DejaVu Sans"/>
+              </a:rPr>
+              <a:t>Σ w</a:t>
             </a:r>
             <a:r>
               <a:rPr sz="2200" b="0" baseline="-25000">
                 <a:latin typeface="DejaVu Sans"/>
               </a:rPr>
               <a:t>i</a:t>
+            </a:r>
+            <a:r>
+              <a:rPr sz="2200" b="0">
+                <a:latin typeface="DejaVu Sans"/>
+              </a:rPr>
+              <a:t>=n</a:t>
+            </a:r>
+            <a:r>
+              <a:rPr sz="2200" b="0">
+                <a:latin typeface="Noto Sans CJK JP"/>
+              </a:rPr>
+              <a:t>、</a:t>
+            </a:r>
+            <a:r>
+              <a:rPr sz="2200" b="0">
+                <a:latin typeface="DejaVu Sans"/>
+              </a:rPr>
+              <a:t>Σ w</a:t>
+            </a:r>
+            <a:r>
+              <a:rPr sz="2200" b="0" baseline="-25000">
+                <a:latin typeface="DejaVu Sans"/>
+              </a:rPr>
+              <a:t>i</a:t>
+            </a:r>
+            <a:r>
+              <a:rPr sz="2200" b="0">
+                <a:latin typeface="DejaVu Sans"/>
+              </a:rPr>
+              <a:t> x</a:t>
+            </a:r>
+            <a:r>
+              <a:rPr sz="2200" b="0" baseline="-25000">
+                <a:latin typeface="DejaVu Sans"/>
+              </a:rPr>
+              <a:t>i</a:t>
+            </a:r>
+            <a:r>
+              <a:rPr sz="2200" b="0">
+                <a:latin typeface="DejaVu Sans"/>
+              </a:rPr>
+              <a:t>=Σ x</a:t>
+            </a:r>
+            <a:r>
+              <a:rPr sz="2200" b="0" baseline="-25000">
+                <a:latin typeface="DejaVu Sans"/>
+              </a:rPr>
+              <a:t>i</a:t>
+            </a:r>
+            <a:r>
+              <a:rPr sz="2200" b="0">
+                <a:latin typeface="Noto Sans CJK JP"/>
+              </a:rPr>
+              <a:t> となる。</a:t>
             </a:r>
           </a:p>
           <a:p>
@@ -29581,55 +29671,31 @@
               <a:rPr sz="2200" b="0">
                 <a:latin typeface="Noto Sans CJK JP"/>
               </a:rPr>
-              <a:t>使った公式 ④：重み付き平均の定義 </a:t>
-            </a:r>
-            <a:r>
-              <a:rPr sz="2200" b="0">
-                <a:latin typeface="DejaVu Sans"/>
-              </a:rPr>
-              <a:t>x̄</a:t>
+              <a:t>このとき前のスライドの式は、2-3 の </a:t>
+            </a:r>
+            <a:r>
+              <a:rPr sz="2200" b="0">
+                <a:latin typeface="DejaVu Sans"/>
+              </a:rPr>
+              <a:t>Σ v</a:t>
             </a:r>
             <a:r>
               <a:rPr sz="2200" b="0" baseline="-25000">
                 <a:latin typeface="DejaVu Sans"/>
               </a:rPr>
-              <a:t>w</a:t>
-            </a:r>
-            <a:r>
-              <a:rPr sz="2200" b="0">
-                <a:latin typeface="DejaVu Sans"/>
-              </a:rPr>
-              <a:t>=Σ w</a:t>
-            </a:r>
-            <a:r>
-              <a:rPr sz="2200" b="0" baseline="-25000">
-                <a:latin typeface="DejaVu Sans"/>
-              </a:rPr>
               <a:t>i</a:t>
             </a:r>
             <a:r>
               <a:rPr sz="2200" b="0">
                 <a:latin typeface="DejaVu Sans"/>
               </a:rPr>
-              <a:t> x</a:t>
-            </a:r>
-            <a:r>
-              <a:rPr sz="2200" b="0" baseline="-25000">
-                <a:latin typeface="DejaVu Sans"/>
-              </a:rPr>
-              <a:t>i</a:t>
-            </a:r>
-            <a:r>
-              <a:rPr sz="2200" b="0">
-                <a:latin typeface="DejaVu Sans"/>
-              </a:rPr>
-              <a:t>/Σ w</a:t>
-            </a:r>
-            <a:r>
-              <a:rPr sz="2200" b="0" baseline="-25000">
-                <a:latin typeface="DejaVu Sans"/>
-              </a:rPr>
-              <a:t>i</a:t>
+              <a:t>=0</a:t>
+            </a:r>
+            <a:r>
+              <a:rPr sz="2200" b="0">
+                <a:latin typeface="Noto Sans CJK JP"/>
+              </a:rPr>
+              <a:t> の式と同じになる。</a:t>
             </a:r>
           </a:p>
           <a:p>
@@ -29648,13 +29714,13 @@
               <a:rPr sz="2200" b="0">
                 <a:latin typeface="Noto Sans CJK JP"/>
               </a:rPr>
-              <a:t>すべて </a:t>
-            </a:r>
-            <a:r>
-              <a:rPr sz="2200" b="0">
-                <a:latin typeface="DejaVu Sans"/>
-              </a:rPr>
-              <a:t>w</a:t>
+              <a:t>重み付き平均の検算は、重みを掛けた残差の和 </a:t>
+            </a:r>
+            <a:r>
+              <a:rPr sz="2200" b="0">
+                <a:latin typeface="DejaVu Sans"/>
+              </a:rPr>
+              <a:t>Σ w</a:t>
             </a:r>
             <a:r>
               <a:rPr sz="2200" b="0" baseline="-25000">
@@ -29666,19 +29732,7 @@
               <a:rPr sz="2200" b="0">
                 <a:latin typeface="DejaVu Sans"/>
               </a:rPr>
-              <a:t>=1</a:t>
-            </a:r>
-            <a:r>
-              <a:rPr sz="2200" b="0">
-                <a:latin typeface="Noto Sans CJK JP"/>
-              </a:rPr>
-              <a:t> なら、2-3 の </a:t>
-            </a:r>
-            <a:r>
-              <a:rPr sz="2200" b="0">
-                <a:latin typeface="DejaVu Sans"/>
-              </a:rPr>
-              <a:t>Σ v</a:t>
+              <a:t> v</a:t>
             </a:r>
             <a:r>
               <a:rPr sz="2200" b="0" baseline="-25000">
@@ -29688,15 +29742,9 @@
             </a:r>
             <a:r>
               <a:rPr sz="2200" b="0">
-                <a:latin typeface="DejaVu Sans"/>
-              </a:rPr>
-              <a:t>=0</a:t>
-            </a:r>
-            <a:r>
-              <a:rPr sz="2200" b="0">
-                <a:latin typeface="Noto Sans CJK JP"/>
-              </a:rPr>
-              <a:t> と同じ手順。</a:t>
+                <a:latin typeface="Noto Sans CJK JP"/>
+              </a:rPr>
+              <a:t>（加重残差和）で行う。</a:t>
             </a:r>
           </a:p>
           <a:p>
@@ -29715,37 +29763,7 @@
               <a:rPr sz="2200" b="0">
                 <a:latin typeface="Noto Sans CJK JP"/>
               </a:rPr>
-              <a:t>検算は、重みを掛けた残差の和 </a:t>
-            </a:r>
-            <a:r>
-              <a:rPr sz="2200" b="0">
-                <a:latin typeface="DejaVu Sans"/>
-              </a:rPr>
-              <a:t>Σ w</a:t>
-            </a:r>
-            <a:r>
-              <a:rPr sz="2200" b="0" baseline="-25000">
-                <a:latin typeface="DejaVu Sans"/>
-              </a:rPr>
-              <a:t>i</a:t>
-            </a:r>
-            <a:r>
-              <a:rPr sz="2200" b="0">
-                <a:latin typeface="DejaVu Sans"/>
-              </a:rPr>
-              <a:t> v</a:t>
-            </a:r>
-            <a:r>
-              <a:rPr sz="2200" b="0" baseline="-25000">
-                <a:latin typeface="DejaVu Sans"/>
-              </a:rPr>
-              <a:t>i</a:t>
-            </a:r>
-            <a:r>
-              <a:rPr sz="2200" b="0">
-                <a:latin typeface="Noto Sans CJK JP"/>
-              </a:rPr>
-              <a:t>（加重残差和）で行う。通常の残差和 </a:t>
+              <a:t>重みを掛けない通常の残差和 </a:t>
             </a:r>
             <a:r>
               <a:rPr sz="2200" b="0">
@@ -30013,7 +30031,7 @@
       </p:sp>
       <p:pic>
         <p:nvPicPr>
-          <p:cNvPr id="4" name="Picture 3" descr="eq_8cb348f1a05b.png"/>
+          <p:cNvPr id="4" name="Picture 3" descr="eq_f847a55d6396.png"/>
           <p:cNvPicPr>
             <a:picLocks noChangeAspect="1"/>
           </p:cNvPicPr>
@@ -30027,8 +30045,8 @@
         </p:blipFill>
         <p:spPr>
           <a:xfrm>
-            <a:off x="5039868" y="1444752"/>
-            <a:ext cx="2111959" cy="772668"/>
+            <a:off x="5131003" y="1444752"/>
+            <a:ext cx="1929688" cy="725119"/>
           </a:xfrm>
           <a:prstGeom prst="rect">
             <a:avLst/>
@@ -30043,8 +30061,8 @@
         </p:nvSpPr>
         <p:spPr>
           <a:xfrm>
-            <a:off x="548640" y="2372868"/>
-            <a:ext cx="11094415" cy="1869440"/>
+            <a:off x="548640" y="2325319"/>
+            <a:ext cx="11094415" cy="1711960"/>
           </a:xfrm>
           <a:prstGeom prst="rect">
             <a:avLst/>
@@ -30063,25 +30081,25 @@
               </a:spcAft>
             </a:pPr>
             <a:r>
-              <a:rPr sz="2200" b="0">
+              <a:rPr sz="2000" b="0">
                 <a:latin typeface="Noto Sans CJK JP"/>
               </a:rPr>
               <a:t>• </a:t>
             </a:r>
             <a:r>
-              <a:rPr sz="2200" b="0">
+              <a:rPr sz="2000" b="0">
                 <a:latin typeface="DejaVu Sans"/>
               </a:rPr>
               <a:t>σ</a:t>
             </a:r>
             <a:r>
-              <a:rPr sz="2200" b="0" baseline="-25000">
+              <a:rPr sz="2000" b="0" baseline="-25000">
                 <a:latin typeface="DejaVu Sans"/>
               </a:rPr>
               <a:t>0</a:t>
             </a:r>
             <a:r>
-              <a:rPr sz="2200" b="0">
+              <a:rPr sz="2000" b="0">
                 <a:latin typeface="Noto Sans CJK JP"/>
               </a:rPr>
               <a:t>：重み1に対応する標準偏差の推定値。</a:t>
@@ -30094,16 +30112,16 @@
               </a:spcAft>
             </a:pPr>
             <a:r>
-              <a:rPr sz="2200" b="0">
+              <a:rPr sz="2000" b="0">
                 <a:latin typeface="Noto Sans CJK JP"/>
               </a:rPr>
               <a:t>• </a:t>
             </a:r>
             <a:r>
-              <a:rPr sz="2200" b="0">
-                <a:latin typeface="Noto Sans CJK JP"/>
-              </a:rPr>
-              <a:t>相対重みを決め、共通の分散尺度を残差から推定する。</a:t>
+              <a:rPr sz="2000" b="0">
+                <a:latin typeface="Noto Sans CJK JP"/>
+              </a:rPr>
+              <a:t>重みは比（相対重み）で与え、重み1あたりの散らばりの大きさは残差から推定する。</a:t>
             </a:r>
           </a:p>
           <a:p>
@@ -30113,22 +30131,34 @@
               </a:spcAft>
             </a:pPr>
             <a:r>
-              <a:rPr sz="2200" b="0">
+              <a:rPr sz="2000" b="0">
                 <a:latin typeface="Noto Sans CJK JP"/>
               </a:rPr>
               <a:t>• </a:t>
             </a:r>
             <a:r>
-              <a:rPr sz="2200" b="0">
+              <a:rPr sz="2000" b="0">
                 <a:latin typeface="DejaVu Sans"/>
               </a:rPr>
               <a:t>n</a:t>
             </a:r>
             <a:r>
-              <a:rPr sz="2200" b="0">
-                <a:latin typeface="Noto Sans CJK JP"/>
-              </a:rPr>
-              <a:t> は統合する独立な値の個数、未知数は最確値1個。</a:t>
+              <a:rPr sz="2000" b="0">
+                <a:latin typeface="Noto Sans CJK JP"/>
+              </a:rPr>
+              <a:t> は統合する独立な値の個数。最確値1個を求めたので、分母は </a:t>
+            </a:r>
+            <a:r>
+              <a:rPr sz="2000" b="0">
+                <a:latin typeface="DejaVu Sans"/>
+              </a:rPr>
+              <a:t>n-1</a:t>
+            </a:r>
+            <a:r>
+              <a:rPr sz="2000" b="0">
+                <a:latin typeface="Noto Sans CJK JP"/>
+              </a:rPr>
+              <a:t>。</a:t>
             </a:r>
           </a:p>
           <a:p>
@@ -30138,49 +30168,49 @@
               </a:spcAft>
             </a:pPr>
             <a:r>
-              <a:rPr sz="2200" b="0">
+              <a:rPr sz="2000" b="0">
                 <a:latin typeface="Noto Sans CJK JP"/>
               </a:rPr>
               <a:t>• </a:t>
             </a:r>
             <a:r>
-              <a:rPr sz="2200" b="0">
+              <a:rPr sz="2000" b="0">
                 <a:latin typeface="Noto Sans CJK JP"/>
               </a:rPr>
               <a:t>無次元の重みなら、</a:t>
             </a:r>
             <a:r>
-              <a:rPr sz="2200" b="0">
+              <a:rPr sz="2000" b="0">
                 <a:latin typeface="DejaVu Sans"/>
               </a:rPr>
               <a:t>v</a:t>
             </a:r>
             <a:r>
-              <a:rPr sz="2200" b="0" baseline="-25000">
+              <a:rPr sz="2000" b="0" baseline="-25000">
                 <a:latin typeface="DejaVu Sans"/>
               </a:rPr>
               <a:t>i</a:t>
             </a:r>
             <a:r>
-              <a:rPr sz="2200" b="0">
+              <a:rPr sz="2000" b="0">
                 <a:latin typeface="Noto Sans CJK JP"/>
               </a:rPr>
               <a:t> と </a:t>
             </a:r>
             <a:r>
-              <a:rPr sz="2200" b="0">
+              <a:rPr sz="2000" b="0">
                 <a:latin typeface="DejaVu Sans"/>
               </a:rPr>
               <a:t>σ</a:t>
             </a:r>
             <a:r>
-              <a:rPr sz="2200" b="0" baseline="-25000">
+              <a:rPr sz="2000" b="0" baseline="-25000">
                 <a:latin typeface="DejaVu Sans"/>
               </a:rPr>
               <a:t>0</a:t>
             </a:r>
             <a:r>
-              <a:rPr sz="2200" b="0">
+              <a:rPr sz="2000" b="0">
                 <a:latin typeface="Noto Sans CJK JP"/>
               </a:rPr>
               <a:t> の単位は同じ。</a:t>
@@ -30728,17 +30758,53 @@
             </a:r>
             <a:r>
               <a:rPr sz="2000" b="0">
-                <a:latin typeface="Noto Sans CJK JP"/>
-              </a:rPr>
-              <a:t>各観測の分散を共通尺度 </a:t>
-            </a:r>
-            <a:r>
-              <a:rPr sz="2000" b="0">
                 <a:latin typeface="DejaVu Sans"/>
               </a:rPr>
               <a:t>τ</a:t>
             </a:r>
             <a:r>
+              <a:rPr sz="2000" b="0" baseline="-25000">
+                <a:latin typeface="DejaVu Sans"/>
+              </a:rPr>
+              <a:t>0</a:t>
+            </a:r>
+            <a:r>
+              <a:rPr sz="2000" b="0">
+                <a:latin typeface="Noto Sans CJK JP"/>
+              </a:rPr>
+              <a:t>：重み1の観測がもつ真の標準偏差。観測 </a:t>
+            </a:r>
+            <a:r>
+              <a:rPr sz="2000" b="0">
+                <a:latin typeface="DejaVu Sans"/>
+              </a:rPr>
+              <a:t>x</a:t>
+            </a:r>
+            <a:r>
+              <a:rPr sz="2000" b="0" baseline="-25000">
+                <a:latin typeface="DejaVu Sans"/>
+              </a:rPr>
+              <a:t>i</a:t>
+            </a:r>
+            <a:r>
+              <a:rPr sz="2000" b="0">
+                <a:latin typeface="Noto Sans CJK JP"/>
+              </a:rPr>
+              <a:t> の分散は </a:t>
+            </a:r>
+            <a:r>
+              <a:rPr sz="2000" b="0">
+                <a:latin typeface="DejaVu Sans"/>
+              </a:rPr>
+              <a:t>τ</a:t>
+            </a:r>
+            <a:r>
+              <a:rPr sz="2000" b="0" baseline="-25000">
+                <a:latin typeface="DejaVu Sans"/>
+              </a:rPr>
+              <a:t>0</a:t>
+            </a:r>
+            <a:r>
               <a:rPr sz="2000" b="0" baseline="30000">
                 <a:latin typeface="DejaVu Sans"/>
               </a:rPr>
@@ -30760,7 +30826,7 @@
               <a:rPr sz="2000" b="0">
                 <a:latin typeface="Noto Sans CJK JP"/>
               </a:rPr>
-              <a:t> として考える。</a:t>
+              <a:t>。</a:t>
             </a:r>
           </a:p>
           <a:p>
@@ -30779,7 +30845,7 @@
               <a:rPr sz="2000" b="0">
                 <a:latin typeface="Noto Sans CJK JP"/>
               </a:rPr>
-              <a:t>正規化した係数 </a:t>
+              <a:t>係数 </a:t>
             </a:r>
             <a:r>
               <a:rPr sz="2000" b="0">
@@ -30809,14 +30875,14 @@
               <a:rPr sz="2000" b="0">
                 <a:latin typeface="Noto Sans CJK JP"/>
               </a:rPr>
-              <a:t> で誤差を伝播させると、</a:t>
+              <a:t> で各観測の分散を伝播させる（2-4 と同じ）と、</a:t>
             </a:r>
           </a:p>
         </p:txBody>
       </p:sp>
       <p:pic>
         <p:nvPicPr>
-          <p:cNvPr id="6" name="Picture 5" descr="eq_1d0af7711ad2.png"/>
+          <p:cNvPr id="6" name="Picture 5" descr="eq_a100567b0bb9.png"/>
           <p:cNvPicPr>
             <a:picLocks noChangeAspect="1"/>
           </p:cNvPicPr>
@@ -30831,7 +30897,7 @@
         <p:spPr>
           <a:xfrm>
             <a:off x="5031943" y="3255670"/>
-            <a:ext cx="2127808" cy="626059"/>
+            <a:ext cx="2127808" cy="693420"/>
           </a:xfrm>
           <a:prstGeom prst="rect">
             <a:avLst/>
@@ -30846,8 +30912,8 @@
         </p:nvSpPr>
         <p:spPr>
           <a:xfrm>
-            <a:off x="548640" y="4037177"/>
-            <a:ext cx="11094415" cy="530860"/>
+            <a:off x="548640" y="4104538"/>
+            <a:ext cx="11094415" cy="924560"/>
           </a:xfrm>
           <a:prstGeom prst="rect">
             <a:avLst/>
@@ -30875,7 +30941,7 @@
               <a:rPr sz="2000" b="0">
                 <a:latin typeface="Noto Sans CJK JP"/>
               </a:rPr>
-              <a:t>未知の尺度 </a:t>
+              <a:t>未知の </a:t>
             </a:r>
             <a:r>
               <a:rPr sz="2000" b="0">
@@ -30884,6 +30950,12 @@
               <a:t>τ</a:t>
             </a:r>
             <a:r>
+              <a:rPr sz="2000" b="0" baseline="-25000">
+                <a:latin typeface="DejaVu Sans"/>
+              </a:rPr>
+              <a:t>0</a:t>
+            </a:r>
+            <a:r>
               <a:rPr sz="2000" b="0">
                 <a:latin typeface="Noto Sans CJK JP"/>
               </a:rPr>
@@ -30906,6 +30978,85 @@
                 <a:latin typeface="Noto Sans CJK JP"/>
               </a:rPr>
               <a:t> で推定する。</a:t>
+            </a:r>
+          </a:p>
+          <a:p>
+            <a:pPr>
+              <a:spcAft>
+                <a:spcPts val="400"/>
+              </a:spcAft>
+            </a:pPr>
+            <a:r>
+              <a:rPr sz="2000" b="0">
+                <a:latin typeface="Noto Sans CJK JP"/>
+              </a:rPr>
+              <a:t>• </a:t>
+            </a:r>
+            <a:r>
+              <a:rPr sz="2000" b="0">
+                <a:latin typeface="Noto Sans CJK JP"/>
+              </a:rPr>
+              <a:t>例題B：</a:t>
+            </a:r>
+            <a:r>
+              <a:rPr sz="2000" b="0">
+                <a:latin typeface="DejaVu Sans"/>
+              </a:rPr>
+              <a:t>σ</a:t>
+            </a:r>
+            <a:r>
+              <a:rPr sz="2000" b="0" baseline="-25000">
+                <a:latin typeface="DejaVu Sans"/>
+              </a:rPr>
+              <a:t>0</a:t>
+            </a:r>
+            <a:r>
+              <a:rPr sz="2000" b="0">
+                <a:latin typeface="DejaVu Sans"/>
+              </a:rPr>
+              <a:t>=8.94</a:t>
+            </a:r>
+            <a:r>
+              <a:rPr sz="2000" b="0">
+                <a:latin typeface="Noto Sans CJK JP"/>
+              </a:rPr>
+              <a:t> mm、</a:t>
+            </a:r>
+            <a:r>
+              <a:rPr sz="2000" b="0">
+                <a:latin typeface="DejaVu Sans"/>
+              </a:rPr>
+              <a:t>Σ w</a:t>
+            </a:r>
+            <a:r>
+              <a:rPr sz="2000" b="0" baseline="-25000">
+                <a:latin typeface="DejaVu Sans"/>
+              </a:rPr>
+              <a:t>i</a:t>
+            </a:r>
+            <a:r>
+              <a:rPr sz="2000" b="0">
+                <a:latin typeface="DejaVu Sans"/>
+              </a:rPr>
+              <a:t>=5</a:t>
+            </a:r>
+            <a:r>
+              <a:rPr sz="2000" b="0">
+                <a:latin typeface="Noto Sans CJK JP"/>
+              </a:rPr>
+              <a:t> なら、</a:t>
+            </a:r>
+            <a:r>
+              <a:rPr sz="2000" b="0">
+                <a:latin typeface="DejaVu Sans"/>
+              </a:rPr>
+              <a:t>8.94/√5=4.00</a:t>
+            </a:r>
+            <a:r>
+              <a:rPr sz="2000" b="0">
+                <a:latin typeface="Noto Sans CJK JP"/>
+              </a:rPr>
+              <a:t> mm。</a:t>
             </a:r>
           </a:p>
         </p:txBody>
@@ -34402,19 +34553,19 @@
               <a:rPr sz="2200" b="0">
                 <a:latin typeface="Noto Sans CJK JP"/>
               </a:rPr>
-              <a:t>：定数項、</a:t>
-            </a:r>
-            <a:r>
-              <a:rPr sz="2200" b="0">
-                <a:latin typeface="DejaVu Sans"/>
-              </a:rPr>
-              <a:t>b</a:t>
-            </a:r>
-            <a:r>
-              <a:rPr sz="2200" b="0">
-                <a:latin typeface="Noto Sans CJK JP"/>
-              </a:rPr>
-              <a:t>：距離比例項の係数、</a:t>
+              <a:t>：距離によらない定数項、</a:t>
+            </a:r>
+            <a:r>
+              <a:rPr sz="2200" b="0">
+                <a:latin typeface="DejaVu Sans"/>
+              </a:rPr>
+              <a:t>p</a:t>
+            </a:r>
+            <a:r>
+              <a:rPr sz="2200" b="0">
+                <a:latin typeface="Noto Sans CJK JP"/>
+              </a:rPr>
+              <a:t>：距離に比例する項の係数、</a:t>
             </a:r>
             <a:r>
               <a:rPr sz="2200" b="0">
@@ -34433,7 +34584,7 @@
       </p:sp>
       <p:pic>
         <p:nvPicPr>
-          <p:cNvPr id="5" name="Picture 4" descr="eq_3aa68ae6367f.png"/>
+          <p:cNvPr id="5" name="Picture 4" descr="eq_8ae3ff2e7c83.png"/>
           <p:cNvPicPr>
             <a:picLocks noChangeAspect="1"/>
           </p:cNvPicPr>

--- a/Surveying/materials/slides/第02回_測量の基礎と誤差論/改訂版_20261008/測量学_第02回_図解改訂版.pptx
+++ b/Surveying/materials/slides/第02回_測量の基礎と誤差論/改訂版_20261008/測量学_第02回_図解改訂版.pptx
@@ -20649,7 +20649,7 @@
               <a:rPr sz="2000" b="0">
                 <a:latin typeface="Noto Sans CJK JP"/>
               </a:rPr>
-              <a:t>コインの例：</a:t>
+              <a:t>コイン2枚の合計 </a:t>
             </a:r>
             <a:r>
               <a:rPr sz="2000" b="0">
@@ -20661,7 +20661,7 @@
               <a:rPr sz="2000" b="0">
                 <a:latin typeface="Noto Sans CJK JP"/>
               </a:rPr>
-              <a:t> は +2, 0, 0, −2 mm の4通り。</a:t>
+              <a:t> は +2, 0, 0, −2 mm。</a:t>
             </a:r>
             <a:r>
               <a:rPr sz="2000" b="0">
@@ -20679,19 +20679,7 @@
               <a:rPr sz="2000" b="0">
                 <a:latin typeface="Noto Sans CJK JP"/>
               </a:rPr>
-              <a:t> の平均は (4+0+0+4)/4=2。標準偏差は </a:t>
-            </a:r>
-            <a:r>
-              <a:rPr sz="2000" b="0">
-                <a:latin typeface="DejaVu Sans"/>
-              </a:rPr>
-              <a:t>√2≈1.41</a:t>
-            </a:r>
-            <a:r>
-              <a:rPr sz="2000" b="0">
-                <a:latin typeface="Noto Sans CJK JP"/>
-              </a:rPr>
-              <a:t> mm で、1+1=2 mm ではない。</a:t>
+              <a:t> の平均は (4+0+0+4)/4=2 mm²。</a:t>
             </a:r>
           </a:p>
           <a:p>
@@ -20710,43 +20698,57 @@
               <a:rPr sz="2000" b="0">
                 <a:latin typeface="Noto Sans CJK JP"/>
               </a:rPr>
-              <a:t>独立なずれは直角三角形の2辺のように合わさる。2辺が3 mmと4 mmなら斜辺は </a:t>
-            </a:r>
-            <a:r>
-              <a:rPr sz="2000" b="0">
-                <a:latin typeface="DejaVu Sans"/>
-              </a:rPr>
-              <a:t>√(3</a:t>
-            </a:r>
-            <a:r>
-              <a:rPr sz="2000" b="0" baseline="30000">
-                <a:latin typeface="DejaVu Sans"/>
-              </a:rPr>
-              <a:t>2</a:t>
-            </a:r>
-            <a:r>
-              <a:rPr sz="2000" b="0">
-                <a:latin typeface="DejaVu Sans"/>
-              </a:rPr>
-              <a:t>+4</a:t>
-            </a:r>
-            <a:r>
-              <a:rPr sz="2000" b="0" baseline="30000">
-                <a:latin typeface="DejaVu Sans"/>
-              </a:rPr>
-              <a:t>2</a:t>
-            </a:r>
-            <a:r>
-              <a:rPr sz="2000" b="0">
-                <a:latin typeface="DejaVu Sans"/>
-              </a:rPr>
-              <a:t>)=5</a:t>
-            </a:r>
-            <a:r>
-              <a:rPr sz="2000" b="0">
-                <a:latin typeface="Noto Sans CJK JP"/>
-              </a:rPr>
-              <a:t> mm。向きがそろうずれは一直線で7 mm。</a:t>
+              <a:t>合計の標準偏差は </a:t>
+            </a:r>
+            <a:r>
+              <a:rPr sz="2000" b="0">
+                <a:latin typeface="DejaVu Sans"/>
+              </a:rPr>
+              <a:t>√2≈1.41</a:t>
+            </a:r>
+            <a:r>
+              <a:rPr sz="2000" b="0">
+                <a:latin typeface="Noto Sans CJK JP"/>
+              </a:rPr>
+              <a:t> mm。1+1=2 mm にはならない。</a:t>
+            </a:r>
+          </a:p>
+          <a:p>
+            <a:pPr>
+              <a:spcAft>
+                <a:spcPts val="400"/>
+              </a:spcAft>
+            </a:pPr>
+            <a:r>
+              <a:rPr sz="2000" b="0">
+                <a:latin typeface="Noto Sans CJK JP"/>
+              </a:rPr>
+              <a:t>• </a:t>
+            </a:r>
+            <a:r>
+              <a:rPr sz="2000" b="0">
+                <a:latin typeface="Noto Sans CJK JP"/>
+              </a:rPr>
+              <a:t>独立なずれは直角三角形の2辺：3 mm と 4 mm なら斜辺は5 mm。</a:t>
+            </a:r>
+          </a:p>
+          <a:p>
+            <a:pPr>
+              <a:spcAft>
+                <a:spcPts val="400"/>
+              </a:spcAft>
+            </a:pPr>
+            <a:r>
+              <a:rPr sz="2000" b="0">
+                <a:latin typeface="Noto Sans CJK JP"/>
+              </a:rPr>
+              <a:t>• </a:t>
+            </a:r>
+            <a:r>
+              <a:rPr sz="2000" b="0">
+                <a:latin typeface="Noto Sans CJK JP"/>
+              </a:rPr>
+              <a:t>同じ向きにそろうずれは一直線に並ぶ：3+4=7 mm。</a:t>
             </a:r>
           </a:p>
         </p:txBody>
@@ -26535,37 +26537,7 @@
               <a:rPr sz="2000" b="0">
                 <a:latin typeface="Noto Sans CJK JP"/>
               </a:rPr>
-              <a:t> とする（合計1）。 組み合わせた値は </a:t>
-            </a:r>
-            <a:r>
-              <a:rPr sz="2000" b="0">
-                <a:latin typeface="DejaVu Sans"/>
-              </a:rPr>
-              <a:t>y=α x</a:t>
-            </a:r>
-            <a:r>
-              <a:rPr sz="2000" b="0" baseline="-25000">
-                <a:latin typeface="DejaVu Sans"/>
-              </a:rPr>
-              <a:t>1</a:t>
-            </a:r>
-            <a:r>
-              <a:rPr sz="2000" b="0">
-                <a:latin typeface="DejaVu Sans"/>
-              </a:rPr>
-              <a:t>+(1-α)x</a:t>
-            </a:r>
-            <a:r>
-              <a:rPr sz="2000" b="0" baseline="-25000">
-                <a:latin typeface="DejaVu Sans"/>
-              </a:rPr>
-              <a:t>2</a:t>
-            </a:r>
-            <a:r>
-              <a:rPr sz="2000" b="0">
-                <a:latin typeface="Noto Sans CJK JP"/>
-              </a:rPr>
-              <a:t>。半々より良い配分は？</a:t>
+              <a:t> とする（合計1）。</a:t>
             </a:r>
           </a:p>
           <a:p>
@@ -26584,13 +26556,68 @@
               <a:rPr sz="2000" b="0">
                 <a:latin typeface="Noto Sans CJK JP"/>
               </a:rPr>
-              <a:t>平均のときと同じく、</a:t>
+              <a:t>組み合わせた値：</a:t>
+            </a:r>
+            <a:r>
+              <a:rPr sz="2000" b="0">
+                <a:latin typeface="DejaVu Sans"/>
+              </a:rPr>
+              <a:t>y=α x</a:t>
+            </a:r>
+            <a:r>
+              <a:rPr sz="2000" b="0" baseline="-25000">
+                <a:latin typeface="DejaVu Sans"/>
+              </a:rPr>
+              <a:t>1</a:t>
+            </a:r>
+            <a:r>
+              <a:rPr sz="2000" b="0">
+                <a:latin typeface="DejaVu Sans"/>
+              </a:rPr>
+              <a:t>+(1-α)x</a:t>
+            </a:r>
+            <a:r>
+              <a:rPr sz="2000" b="0" baseline="-25000">
+                <a:latin typeface="DejaVu Sans"/>
+              </a:rPr>
+              <a:t>2</a:t>
+            </a:r>
+            <a:r>
+              <a:rPr sz="2000" b="0">
+                <a:latin typeface="Noto Sans CJK JP"/>
+              </a:rPr>
+              <a:t>。半々より良い配分は？</a:t>
+            </a:r>
+          </a:p>
+          <a:p>
+            <a:pPr>
+              <a:spcAft>
+                <a:spcPts val="400"/>
+              </a:spcAft>
+            </a:pPr>
+            <a:r>
+              <a:rPr sz="2000" b="0">
+                <a:latin typeface="Noto Sans CJK JP"/>
+              </a:rPr>
+              <a:t>• </a:t>
             </a:r>
             <a:r>
               <a:rPr sz="2000" b="1">
-                <a:latin typeface="Noto Sans CJK JP"/>
-              </a:rPr>
-              <a:t>各観測の分散に、割合の二乗を掛けて足す。</a:t>
+                <a:latin typeface="DejaVu Sans"/>
+              </a:rPr>
+              <a:t>y</a:t>
+            </a:r>
+            <a:r>
+              <a:rPr sz="2000" b="1">
+                <a:latin typeface="Noto Sans CJK JP"/>
+              </a:rPr>
+              <a:t> の分散＝各観測の分散×割合の二乗、の和</a:t>
+            </a:r>
+            <a:r>
+              <a:rPr sz="2000" b="0">
+                <a:latin typeface="Noto Sans CJK JP"/>
+              </a:rPr>
+              <a:t>（平均のときと同じ）。</a:t>
             </a:r>
           </a:p>
         </p:txBody>

--- a/Surveying/materials/slides/第02回_測量の基礎と誤差論/改訂版_20261008/測量学_第02回_図解改訂版.pptx
+++ b/Surveying/materials/slides/第02回_測量の基礎と誤差論/改訂版_20261008/測量学_第02回_図解改訂版.pptx
@@ -31460,7 +31460,7 @@
               <a:rPr sz="2200" b="0">
                 <a:latin typeface="Noto Sans CJK JP"/>
               </a:rPr>
-              <a:t> を単位つき（mm など）で既知として </a:t>
+              <a:t> が単位つき（mm など）で既知なら、</a:t>
             </a:r>
             <a:r>
               <a:rPr sz="2200" b="0">
@@ -31496,49 +31496,7 @@
               <a:rPr sz="2200" b="0">
                 <a:latin typeface="Noto Sans CJK JP"/>
               </a:rPr>
-              <a:t> と置く場合、 平均の標準偏差は </a:t>
-            </a:r>
-            <a:r>
-              <a:rPr sz="2200" b="0">
-                <a:latin typeface="DejaVu Sans"/>
-              </a:rPr>
-              <a:t>1/√(Σ w</a:t>
-            </a:r>
-            <a:r>
-              <a:rPr sz="2200" b="0" baseline="-25000">
-                <a:latin typeface="DejaVu Sans"/>
-              </a:rPr>
-              <a:t>i</a:t>
-            </a:r>
-            <a:r>
-              <a:rPr sz="2200" b="0">
-                <a:latin typeface="DejaVu Sans"/>
-              </a:rPr>
-              <a:t>)</a:t>
-            </a:r>
-            <a:r>
-              <a:rPr sz="2200" b="0">
-                <a:latin typeface="Noto Sans CJK JP"/>
-              </a:rPr>
-              <a:t>（重みの単位は </a:t>
-            </a:r>
-            <a:r>
-              <a:rPr sz="2200" b="0">
-                <a:latin typeface="DejaVu Sans"/>
-              </a:rPr>
-              <a:t>mm</a:t>
-            </a:r>
-            <a:r>
-              <a:rPr sz="2200" b="0" baseline="30000">
-                <a:latin typeface="DejaVu Sans"/>
-              </a:rPr>
-              <a:t>-2</a:t>
-            </a:r>
-            <a:r>
-              <a:rPr sz="2200" b="0">
-                <a:latin typeface="Noto Sans CJK JP"/>
-              </a:rPr>
-              <a:t>）。</a:t>
+              <a:t> と置ける。</a:t>
             </a:r>
           </a:p>
           <a:p>
@@ -31557,6 +31515,67 @@
               <a:rPr sz="2200" b="0">
                 <a:latin typeface="Noto Sans CJK JP"/>
               </a:rPr>
+              <a:t>このとき平均の標準偏差は </a:t>
+            </a:r>
+            <a:r>
+              <a:rPr sz="2200" b="0">
+                <a:latin typeface="DejaVu Sans"/>
+              </a:rPr>
+              <a:t>1/√(Σ w</a:t>
+            </a:r>
+            <a:r>
+              <a:rPr sz="2200" b="0" baseline="-25000">
+                <a:latin typeface="DejaVu Sans"/>
+              </a:rPr>
+              <a:t>i</a:t>
+            </a:r>
+            <a:r>
+              <a:rPr sz="2200" b="0">
+                <a:latin typeface="DejaVu Sans"/>
+              </a:rPr>
+              <a:t>)</a:t>
+            </a:r>
+            <a:r>
+              <a:rPr sz="2200" b="0">
+                <a:latin typeface="Noto Sans CJK JP"/>
+              </a:rPr>
+              <a:t>（重みの単位は </a:t>
+            </a:r>
+            <a:r>
+              <a:rPr sz="2200" b="0">
+                <a:latin typeface="DejaVu Sans"/>
+              </a:rPr>
+              <a:t>mm</a:t>
+            </a:r>
+            <a:r>
+              <a:rPr sz="2200" b="0" baseline="30000">
+                <a:latin typeface="DejaVu Sans"/>
+              </a:rPr>
+              <a:t>-2</a:t>
+            </a:r>
+            <a:r>
+              <a:rPr sz="2200" b="0">
+                <a:latin typeface="Noto Sans CJK JP"/>
+              </a:rPr>
+              <a:t>）。</a:t>
+            </a:r>
+          </a:p>
+          <a:p>
+            <a:pPr>
+              <a:spcAft>
+                <a:spcPts val="400"/>
+              </a:spcAft>
+            </a:pPr>
+            <a:r>
+              <a:rPr sz="2200" b="0">
+                <a:latin typeface="Noto Sans CJK JP"/>
+              </a:rPr>
+              <a:t>• </a:t>
+            </a:r>
+            <a:r>
+              <a:rPr sz="2200" b="0">
+                <a:latin typeface="Noto Sans CJK JP"/>
+              </a:rPr>
               <a:t>例：</a:t>
             </a:r>
             <a:r>
@@ -31605,7 +31624,7 @@
               <a:rPr sz="2200" b="0">
                 <a:latin typeface="Noto Sans CJK JP"/>
               </a:rPr>
-              <a:t> mm なら </a:t>
+              <a:t> mm → </a:t>
             </a:r>
             <a:r>
               <a:rPr sz="2200" b="0">
@@ -31629,7 +31648,7 @@
               <a:rPr sz="2200" b="0">
                 <a:latin typeface="Noto Sans CJK JP"/>
               </a:rPr>
-              <a:t> で、平均の標準偏差は 0.894 mm。</a:t>
+              <a:t>、平均の標準偏差 0.894 mm</a:t>
             </a:r>
           </a:p>
         </p:txBody>
@@ -36524,7 +36543,20 @@
               <a:rPr sz="2200" b="0">
                 <a:latin typeface="Noto Sans CJK JP"/>
               </a:rPr>
-              <a:t>この情報だけで妥当性（正確さ）が十分と判断してよいか。 必要な点検を一つ挙げよう。</a:t>
+              <a:t>この情報だけで妥当性（正確さ）が十分と判断してよいか。</a:t>
+            </a:r>
+          </a:p>
+          <a:p>
+            <a:pPr>
+              <a:spcAft>
+                <a:spcPts val="600"/>
+              </a:spcAft>
+            </a:pPr>
+            <a:r>
+              <a:rPr sz="2200" b="0">
+                <a:latin typeface="Noto Sans CJK JP"/>
+              </a:rPr>
+              <a:t>必要な点検を一つ挙げよう。</a:t>
             </a:r>
           </a:p>
         </p:txBody>
@@ -37098,7 +37130,20 @@
               <a:rPr sz="2200" b="0">
                 <a:latin typeface="Noto Sans CJK JP"/>
               </a:rPr>
-              <a:t>、 1観測の標準偏差 </a:t>
+              <a:t>、</a:t>
+            </a:r>
+          </a:p>
+          <a:p>
+            <a:pPr>
+              <a:spcAft>
+                <a:spcPts val="600"/>
+              </a:spcAft>
+            </a:pPr>
+            <a:r>
+              <a:rPr sz="2200" b="0">
+                <a:latin typeface="Noto Sans CJK JP"/>
+              </a:rPr>
+              <a:t>1観測の標準偏差 </a:t>
             </a:r>
             <a:r>
               <a:rPr sz="2200" b="0">
